--- a/materials/pdf/original/DS07_Folien_Der-Automat-stoesst-an-Grenzen.pptx
+++ b/materials/pdf/original/DS07_Folien_Der-Automat-stoesst-an-Grenzen.pptx
@@ -124,12 +124,12 @@
   <p:extLst>
     <p:ext uri="{521415D9-36F7-43E2-AB2F-B90AF26B5E84}">
       <p14:sectionLst xmlns:p14="http://schemas.microsoft.com/office/powerpoint/2010/main">
-        <p14:section name="Start" id="{4ecefa0a-dcd7-a80b-d090-a4e4a98b1ff8}">
+        <p14:section name="Start" id="{d1934b3d-4e8e-902b-c951-5dcbb6f8b524}">
           <p14:sldIdLst>
             <p14:sldId id="256"/>
           </p14:sldIdLst>
         </p14:section>
-        <p14:section name="Einstieg" id="{a32798b8-2575-caf7-8104-d793309015d6}">
+        <p14:section name="Einstieg" id="{e44b8c16-dcc6-c509-ad9a-62b064273b01}">
           <p14:sldIdLst>
             <p14:sldId id="257"/>
             <p14:sldId id="258"/>
@@ -138,7 +138,7 @@
             <p14:sldId id="261"/>
           </p14:sldIdLst>
         </p14:section>
-        <p14:section name="Erarbeitung" id="{ee5902f9-37ab-549c-935b-821ba0187a5a}">
+        <p14:section name="Erarbeitung" id="{3ddd4c7f-458e-ebb6-eef2-cccca614d0a6}">
           <p14:sldIdLst>
             <p14:sldId id="262"/>
             <p14:sldId id="263"/>
@@ -148,20 +148,20 @@
             <p14:sldId id="267"/>
           </p14:sldIdLst>
         </p14:section>
-        <p14:section name="Übung" id="{30e76d28-feb3-b195-9db4-b6e8a41ef082}">
+        <p14:section name="Übung" id="{71b32746-48b7-1c49-7c2f-2c6fdb8321f0}">
           <p14:sldIdLst>
             <p14:sldId id="268"/>
             <p14:sldId id="269"/>
             <p14:sldId id="270"/>
           </p14:sldIdLst>
         </p14:section>
-        <p14:section name="Sicherung" id="{f1e76961-c3d7-2ade-4604-cce5e45e3488}">
+        <p14:section name="Sicherung" id="{fc6921ca-78bf-42b8-ded0-5b1be3942a46}">
           <p14:sldIdLst>
             <p14:sldId id="271"/>
             <p14:sldId id="272"/>
           </p14:sldIdLst>
         </p14:section>
-        <p14:section name="Abschluss" id="{570b51d6-7fc0-a2f8-eefa-b3384570927d}">
+        <p14:section name="Abschluss" id="{267e67c2-bba8-7732-928a-c7f58f9e8ed7}">
           <p14:sldIdLst>
             <p14:sldId id="273"/>
           </p14:sldIdLst>
@@ -1098,7 +1098,7 @@
           <a:p>
             <a:r>
               <a:rPr lang="en-US" dirty="0"/>
-              <a:t>Auflösung der Fallen nach der Zwischensicherung zeigen. L8 ist die Profi-Falle: Ausprobieren mit abab (ab 2×, ba 1×) und aba (je 1×).</a:t>
+              <a:t>[NUR LEHRKRAFT] Auflösung der Fallen nach der Zwischensicherung zeigen. L8 ist die Profi-Falle: Ausprobieren mit abab (ab 2×, ba 1×) und aba (je 1×).</a:t>
             </a:r>
             <a:endParaRPr lang="en-US" dirty="0"/>
           </a:p>
@@ -1714,7 +1714,7 @@
           <a:p>
             <a:r>
               <a:rPr lang="en-US" dirty="0"/>
-              <a:t>EEEEAAAA: Der vierte Gast ist einer zu viel – Fehlerzustand, obwohl der Club am Ende wieder leer wäre.</a:t>
+              <a:t>[NUR LEHRKRAFT] EEEEAAAA: Der vierte Gast ist einer zu viel – Fehlerzustand, obwohl der Club am Ende wieder leer wäre.</a:t>
             </a:r>
             <a:endParaRPr lang="en-US" dirty="0"/>
           </a:p>
@@ -2066,7 +2066,7 @@
           <a:p>
             <a:r>
               <a:rPr lang="en-US" dirty="0"/>
-              <a:t>aabb: S0 –a→ S1 –a→ S2 –b→ S3 –b→ S4. aaabb: S0 –a→ S1 –a→ S2 –a→ S2 –b→ S3 –b→ S4 – akzeptiert, obwohl nicht in L.</a:t>
+              <a:t>[NUR LEHRKRAFT] aabb: S0 –a→ S1 –a→ S2 –b→ S3 –b→ S4. aaabb: S0 –a→ S1 –a→ S2 –a→ S2 –b→ S3 –b→ S4 – akzeptiert, obwohl nicht in L.</a:t>
             </a:r>
             <a:endParaRPr lang="en-US" dirty="0"/>
           </a:p>

--- a/materials/pdf/original/DS07_Folien_Der-Automat-stoesst-an-Grenzen.pptx
+++ b/materials/pdf/original/DS07_Folien_Der-Automat-stoesst-an-Grenzen.pptx
@@ -124,12 +124,12 @@
   <p:extLst>
     <p:ext uri="{521415D9-36F7-43E2-AB2F-B90AF26B5E84}">
       <p14:sectionLst xmlns:p14="http://schemas.microsoft.com/office/powerpoint/2010/main">
-        <p14:section name="Start" id="{d1934b3d-4e8e-902b-c951-5dcbb6f8b524}">
+        <p14:section name="Start" id="{789cebf7-0814-9c04-e9e3-90e1fd75285d}">
           <p14:sldIdLst>
             <p14:sldId id="256"/>
           </p14:sldIdLst>
         </p14:section>
-        <p14:section name="Einstieg" id="{e44b8c16-dcc6-c509-ad9a-62b064273b01}">
+        <p14:section name="Einstieg" id="{fb2fde9c-e6e2-e6f5-bf54-7b20cc3e8f59}">
           <p14:sldIdLst>
             <p14:sldId id="257"/>
             <p14:sldId id="258"/>
@@ -138,7 +138,7 @@
             <p14:sldId id="261"/>
           </p14:sldIdLst>
         </p14:section>
-        <p14:section name="Erarbeitung" id="{3ddd4c7f-458e-ebb6-eef2-cccca614d0a6}">
+        <p14:section name="Erarbeitung" id="{2439d8c0-c210-b4fa-10f7-f827fd33cd34}">
           <p14:sldIdLst>
             <p14:sldId id="262"/>
             <p14:sldId id="263"/>
@@ -148,20 +148,20 @@
             <p14:sldId id="267"/>
           </p14:sldIdLst>
         </p14:section>
-        <p14:section name="Übung" id="{71b32746-48b7-1c49-7c2f-2c6fdb8321f0}">
+        <p14:section name="Übung" id="{904c5c4d-21fc-6c52-626f-7df217ac1d00}">
           <p14:sldIdLst>
             <p14:sldId id="268"/>
             <p14:sldId id="269"/>
             <p14:sldId id="270"/>
           </p14:sldIdLst>
         </p14:section>
-        <p14:section name="Sicherung" id="{fc6921ca-78bf-42b8-ded0-5b1be3942a46}">
+        <p14:section name="Sicherung" id="{c6241daa-9a4c-adf1-b0b7-25c6fce10532}">
           <p14:sldIdLst>
             <p14:sldId id="271"/>
             <p14:sldId id="272"/>
           </p14:sldIdLst>
         </p14:section>
-        <p14:section name="Abschluss" id="{267e67c2-bba8-7732-928a-c7f58f9e8ed7}">
+        <p14:section name="Abschluss" id="{a3c866e6-ad6b-6fdd-b5e1-55e7307a005b}">
           <p14:sldIdLst>
             <p14:sldId id="273"/>
           </p14:sldIdLst>
@@ -2393,6 +2393,45 @@
       </p:sp>
       <p:sp>
         <p:nvSpPr>
+          <p:cNvPr id="4" name="Text 1"/>
+          <p:cNvSpPr/>
+          <p:nvPr/>
+        </p:nvSpPr>
+        <p:spPr>
+          <a:xfrm>
+            <a:off x="7985455" y="6473952"/>
+            <a:ext cx="2926080" cy="274320"/>
+          </a:xfrm>
+          <a:prstGeom prst="rect">
+            <a:avLst/>
+          </a:prstGeom>
+          <a:noFill/>
+          <a:ln/>
+        </p:spPr>
+        <p:txBody>
+          <a:bodyPr wrap="square" lIns="0" tIns="0" rIns="0" bIns="0" rtlCol="0" anchor="ctr"/>
+          <a:lstStyle/>
+          <a:p>
+            <a:pPr algn="r" indent="0" marL="0">
+              <a:buNone/>
+            </a:pPr>
+            <a:r>
+              <a:rPr lang="en-US" sz="1100" dirty="0">
+                <a:solidFill>
+                  <a:srgbClr val="5B6770"/>
+                </a:solidFill>
+                <a:latin typeface="Calibri" pitchFamily="34" charset="0"/>
+                <a:ea typeface="Calibri" pitchFamily="34" charset="-122"/>
+                <a:cs typeface="Calibri" pitchFamily="34" charset="-120"/>
+              </a:rPr>
+              <a:t>CC BY-SA 4.0 · Frank Juchim</a:t>
+            </a:r>
+            <a:endParaRPr lang="en-US" sz="1100" dirty="0"/>
+          </a:p>
+        </p:txBody>
+      </p:sp>
+      <p:sp>
+        <p:nvSpPr>
           <p:cNvPr id="25" name="Slide Number Placeholder 0"/>
           <p:cNvSpPr>
             <a:spLocks noGrp="1"/>
@@ -2544,6 +2583,45 @@
                 <a:cs typeface="Calibri" pitchFamily="34" charset="-120"/>
               </a:rPr>
               <a:t>Level 7 · Welt B · Grenzen &amp; Keller · gA und eA</a:t>
+            </a:r>
+            <a:endParaRPr lang="en-US" sz="1100" dirty="0"/>
+          </a:p>
+        </p:txBody>
+      </p:sp>
+      <p:sp>
+        <p:nvSpPr>
+          <p:cNvPr id="4" name="Text 1"/>
+          <p:cNvSpPr/>
+          <p:nvPr/>
+        </p:nvSpPr>
+        <p:spPr>
+          <a:xfrm>
+            <a:off x="7985455" y="6473952"/>
+            <a:ext cx="2926080" cy="274320"/>
+          </a:xfrm>
+          <a:prstGeom prst="rect">
+            <a:avLst/>
+          </a:prstGeom>
+          <a:noFill/>
+          <a:ln/>
+        </p:spPr>
+        <p:txBody>
+          <a:bodyPr wrap="square" lIns="0" tIns="0" rIns="0" bIns="0" rtlCol="0" anchor="ctr"/>
+          <a:lstStyle/>
+          <a:p>
+            <a:pPr algn="r" indent="0" marL="0">
+              <a:buNone/>
+            </a:pPr>
+            <a:r>
+              <a:rPr lang="en-US" sz="1100" dirty="0">
+                <a:solidFill>
+                  <a:srgbClr val="5B6770"/>
+                </a:solidFill>
+                <a:latin typeface="Calibri" pitchFamily="34" charset="0"/>
+                <a:ea typeface="Calibri" pitchFamily="34" charset="-122"/>
+                <a:cs typeface="Calibri" pitchFamily="34" charset="-120"/>
+              </a:rPr>
+              <a:t>CC BY-SA 4.0 · Frank Juchim</a:t>
             </a:r>
             <a:endParaRPr lang="en-US" sz="1100" dirty="0"/>
           </a:p>
